--- a/docs/Resonance-Installation-Deck.pptx
+++ b/docs/Resonance-Installation-Deck.pptx
@@ -3308,7 +3308,7 @@
             <a:pPr algn="l">
               <a:defRPr sz="900" b="0" i="0">
                 <a:solidFill>
-                  <a:srgbClr val="7C3AED"/>
+                  <a:srgbClr val="8B5CF6"/>
                 </a:solidFill>
                 <a:latin typeface="Consolas"/>
               </a:defRPr>
@@ -3380,7 +3380,7 @@
             <a:pPr algn="l">
               <a:defRPr sz="1400" b="0" i="1">
                 <a:solidFill>
-                  <a:srgbClr val="A778F2"/>
+                  <a:srgbClr val="C4B5FD"/>
                 </a:solidFill>
                 <a:latin typeface="Calibri"/>
               </a:defRPr>
@@ -3558,7 +3558,7 @@
             <a:pPr algn="ctr">
               <a:defRPr sz="900" b="0" i="0">
                 <a:solidFill>
-                  <a:srgbClr val="7C3AED"/>
+                  <a:srgbClr val="8B5CF6"/>
                 </a:solidFill>
                 <a:latin typeface="Consolas"/>
               </a:defRPr>
@@ -3713,7 +3713,7 @@
             <a:pPr algn="ctr">
               <a:defRPr sz="1300" b="0" i="0">
                 <a:solidFill>
-                  <a:srgbClr val="7C3AED"/>
+                  <a:srgbClr val="8B5CF6"/>
                 </a:solidFill>
                 <a:latin typeface="Consolas"/>
               </a:defRPr>
@@ -3811,7 +3811,7 @@
             <a:pPr algn="l">
               <a:defRPr sz="900" b="0" i="0">
                 <a:solidFill>
-                  <a:srgbClr val="7C3AED"/>
+                  <a:srgbClr val="8B5CF6"/>
                 </a:solidFill>
                 <a:latin typeface="Consolas"/>
               </a:defRPr>
@@ -3974,7 +3974,7 @@
             <a:pPr algn="l">
               <a:defRPr sz="900" b="0" i="0">
                 <a:solidFill>
-                  <a:srgbClr val="7C3AED"/>
+                  <a:srgbClr val="8B5CF6"/>
                 </a:solidFill>
                 <a:latin typeface="Consolas"/>
               </a:defRPr>
@@ -4053,7 +4053,7 @@
             <a:pPr algn="l">
               <a:defRPr sz="900" b="0" i="0">
                 <a:solidFill>
-                  <a:srgbClr val="7C3AED"/>
+                  <a:srgbClr val="8B5CF6"/>
                 </a:solidFill>
                 <a:latin typeface="Consolas"/>
               </a:defRPr>
@@ -4128,7 +4128,7 @@
             <a:pPr algn="l">
               <a:defRPr sz="900" b="0" i="0">
                 <a:solidFill>
-                  <a:srgbClr val="7C3AED"/>
+                  <a:srgbClr val="8B5CF6"/>
                 </a:solidFill>
                 <a:latin typeface="Consolas"/>
               </a:defRPr>
@@ -4203,7 +4203,7 @@
             <a:pPr algn="l">
               <a:defRPr sz="900" b="0" i="0">
                 <a:solidFill>
-                  <a:srgbClr val="7C3AED"/>
+                  <a:srgbClr val="8B5CF6"/>
                 </a:solidFill>
                 <a:latin typeface="Consolas"/>
               </a:defRPr>
@@ -4278,7 +4278,7 @@
             <a:pPr algn="l">
               <a:defRPr sz="900" b="0" i="0">
                 <a:solidFill>
-                  <a:srgbClr val="7C3AED"/>
+                  <a:srgbClr val="8B5CF6"/>
                 </a:solidFill>
                 <a:latin typeface="Consolas"/>
               </a:defRPr>
@@ -4353,7 +4353,7 @@
             <a:pPr algn="l">
               <a:defRPr sz="900" b="0" i="0">
                 <a:solidFill>
-                  <a:srgbClr val="7C3AED"/>
+                  <a:srgbClr val="8B5CF6"/>
                 </a:solidFill>
                 <a:latin typeface="Consolas"/>
               </a:defRPr>
@@ -4454,7 +4454,7 @@
             <a:pPr algn="l">
               <a:defRPr sz="900" b="0" i="0">
                 <a:solidFill>
-                  <a:srgbClr val="7C3AED"/>
+                  <a:srgbClr val="8B5CF6"/>
                 </a:solidFill>
                 <a:latin typeface="Consolas"/>
               </a:defRPr>
@@ -4608,7 +4608,7 @@
             <a:pPr algn="l">
               <a:defRPr sz="1000" b="0" i="0">
                 <a:solidFill>
-                  <a:srgbClr val="7C3AED"/>
+                  <a:srgbClr val="8B5CF6"/>
                 </a:solidFill>
                 <a:latin typeface="Consolas"/>
               </a:defRPr>
@@ -4762,7 +4762,7 @@
             <a:pPr algn="l">
               <a:defRPr sz="1000" b="0" i="0">
                 <a:solidFill>
-                  <a:srgbClr val="7C3AED"/>
+                  <a:srgbClr val="8B5CF6"/>
                 </a:solidFill>
                 <a:latin typeface="Consolas"/>
               </a:defRPr>
@@ -4916,7 +4916,7 @@
             <a:pPr algn="l">
               <a:defRPr sz="1000" b="0" i="0">
                 <a:solidFill>
-                  <a:srgbClr val="7C3AED"/>
+                  <a:srgbClr val="8B5CF6"/>
                 </a:solidFill>
                 <a:latin typeface="Consolas"/>
               </a:defRPr>
@@ -5070,7 +5070,7 @@
             <a:pPr algn="l">
               <a:defRPr sz="1000" b="0" i="0">
                 <a:solidFill>
-                  <a:srgbClr val="7C3AED"/>
+                  <a:srgbClr val="8B5CF6"/>
                 </a:solidFill>
                 <a:latin typeface="Consolas"/>
               </a:defRPr>
@@ -5207,7 +5207,7 @@
             <a:pPr algn="l">
               <a:defRPr sz="900" b="0" i="0">
                 <a:solidFill>
-                  <a:srgbClr val="7C3AED"/>
+                  <a:srgbClr val="8B5CF6"/>
                 </a:solidFill>
                 <a:latin typeface="Consolas"/>
               </a:defRPr>
@@ -5329,7 +5329,7 @@
             <a:pPr algn="l">
               <a:defRPr sz="900" b="0" i="0">
                 <a:solidFill>
-                  <a:srgbClr val="7C3AED"/>
+                  <a:srgbClr val="8B5CF6"/>
                 </a:solidFill>
                 <a:latin typeface="Consolas"/>
               </a:defRPr>
@@ -5430,7 +5430,7 @@
             <a:pPr algn="l">
               <a:defRPr sz="900" b="0" i="0">
                 <a:solidFill>
-                  <a:srgbClr val="7C3AED"/>
+                  <a:srgbClr val="8B5CF6"/>
                 </a:solidFill>
                 <a:latin typeface="Consolas"/>
               </a:defRPr>
@@ -5581,7 +5581,7 @@
             <a:pPr algn="l">
               <a:defRPr sz="1200" b="0" i="1">
                 <a:solidFill>
-                  <a:srgbClr val="A778F2"/>
+                  <a:srgbClr val="C4B5FD"/>
                 </a:solidFill>
                 <a:latin typeface="Consolas"/>
               </a:defRPr>
@@ -5735,7 +5735,7 @@
             <a:pPr algn="l">
               <a:defRPr sz="1200" b="0" i="1">
                 <a:solidFill>
-                  <a:srgbClr val="A778F2"/>
+                  <a:srgbClr val="C4B5FD"/>
                 </a:solidFill>
                 <a:latin typeface="Consolas"/>
               </a:defRPr>
@@ -5889,7 +5889,7 @@
             <a:pPr algn="l">
               <a:defRPr sz="1200" b="0" i="1">
                 <a:solidFill>
-                  <a:srgbClr val="A778F2"/>
+                  <a:srgbClr val="C4B5FD"/>
                 </a:solidFill>
                 <a:latin typeface="Consolas"/>
               </a:defRPr>
@@ -5990,7 +5990,7 @@
             <a:pPr algn="l">
               <a:defRPr sz="900" b="0" i="0">
                 <a:solidFill>
-                  <a:srgbClr val="7C3AED"/>
+                  <a:srgbClr val="8B5CF6"/>
                 </a:solidFill>
                 <a:latin typeface="Consolas"/>
               </a:defRPr>
@@ -6153,7 +6153,7 @@
             <a:pPr algn="l">
               <a:defRPr sz="900" b="0" i="0">
                 <a:solidFill>
-                  <a:srgbClr val="7C3AED"/>
+                  <a:srgbClr val="8B5CF6"/>
                 </a:solidFill>
                 <a:latin typeface="Consolas"/>
               </a:defRPr>
@@ -6218,7 +6218,7 @@
             <a:avLst/>
           </a:prstGeom>
           <a:solidFill>
-            <a:srgbClr val="7C3AED"/>
+            <a:srgbClr val="8B5CF6"/>
           </a:solidFill>
           <a:ln>
             <a:noFill/>
@@ -6300,7 +6300,7 @@
             <a:avLst/>
           </a:prstGeom>
           <a:solidFill>
-            <a:srgbClr val="7C3AED"/>
+            <a:srgbClr val="8B5CF6"/>
           </a:solidFill>
           <a:ln>
             <a:noFill/>
@@ -6382,7 +6382,7 @@
             <a:avLst/>
           </a:prstGeom>
           <a:solidFill>
-            <a:srgbClr val="7C3AED"/>
+            <a:srgbClr val="8B5CF6"/>
           </a:solidFill>
           <a:ln>
             <a:noFill/>
